--- a/materials/Day3.pptx
+++ b/materials/Day3.pptx
@@ -5,7 +5,7 @@
     <p:sldMasterId id="2147483648" r:id="rId1"/>
   </p:sldMasterIdLst>
   <p:notesMasterIdLst>
-    <p:notesMasterId r:id="rId29"/>
+    <p:notesMasterId r:id="rId25"/>
   </p:notesMasterIdLst>
   <p:sldIdLst>
     <p:sldId id="375" r:id="rId2"/>
@@ -31,10 +31,6 @@
     <p:sldId id="546" r:id="rId22"/>
     <p:sldId id="561" r:id="rId23"/>
     <p:sldId id="262" r:id="rId24"/>
-    <p:sldId id="411" r:id="rId25"/>
-    <p:sldId id="492" r:id="rId26"/>
-    <p:sldId id="452" r:id="rId27"/>
-    <p:sldId id="453" r:id="rId28"/>
   </p:sldIdLst>
   <p:sldSz cx="12192000" cy="6858000"/>
   <p:notesSz cx="6858000" cy="12192000"/>
@@ -1934,107 +1930,6 @@
     <p:extLst>
       <p:ext uri="{BB962C8B-B14F-4D97-AF65-F5344CB8AC3E}">
         <p14:creationId xmlns:p14="http://schemas.microsoft.com/office/powerpoint/2010/main" val="1024086991"/>
-      </p:ext>
-    </p:extLst>
-  </p:cSld>
-  <p:clrMapOvr>
-    <a:masterClrMapping/>
-  </p:clrMapOvr>
-</p:notes>
-</file>
-
-<file path=ppt/notesSlides/notesSlide15.xml><?xml version="1.0" encoding="utf-8"?>
-<p:notes xmlns:a="http://schemas.openxmlformats.org/drawingml/2006/main" xmlns:r="http://schemas.openxmlformats.org/officeDocument/2006/relationships" xmlns:p="http://schemas.openxmlformats.org/presentationml/2006/main">
-  <p:cSld>
-    <p:spTree>
-      <p:nvGrpSpPr>
-        <p:cNvPr id="1" name="">
-          <a:extLst>
-            <a:ext uri="{FF2B5EF4-FFF2-40B4-BE49-F238E27FC236}">
-              <a16:creationId xmlns:a16="http://schemas.microsoft.com/office/drawing/2014/main" id="{9802E226-7E68-9CF6-0474-61FFF48943EE}"/>
-            </a:ext>
-          </a:extLst>
-        </p:cNvPr>
-        <p:cNvGrpSpPr/>
-        <p:nvPr/>
-      </p:nvGrpSpPr>
-      <p:grpSpPr>
-        <a:xfrm>
-          <a:off x="0" y="0"/>
-          <a:ext cx="0" cy="0"/>
-          <a:chOff x="0" y="0"/>
-          <a:chExt cx="0" cy="0"/>
-        </a:xfrm>
-      </p:grpSpPr>
-      <p:sp>
-        <p:nvSpPr>
-          <p:cNvPr id="2" name="Slide Image Placeholder 1">
-            <a:extLst>
-              <a:ext uri="{FF2B5EF4-FFF2-40B4-BE49-F238E27FC236}">
-                <a16:creationId xmlns:a16="http://schemas.microsoft.com/office/drawing/2014/main" id="{13631BF1-4012-77F1-CF86-FFE22B699173}"/>
-              </a:ext>
-            </a:extLst>
-          </p:cNvPr>
-          <p:cNvSpPr>
-            <a:spLocks noGrp="1" noRot="1" noChangeAspect="1"/>
-          </p:cNvSpPr>
-          <p:nvPr>
-            <p:ph type="sldImg"/>
-          </p:nvPr>
-        </p:nvSpPr>
-        <p:spPr>
-          <a:xfrm>
-            <a:off x="-228600" y="1524000"/>
-            <a:ext cx="7315200" cy="4114800"/>
-          </a:xfrm>
-          <a:prstGeom prst="rect">
-            <a:avLst/>
-          </a:prstGeom>
-          <a:noFill/>
-          <a:ln w="12700">
-            <a:solidFill>
-              <a:prstClr val="black"/>
-            </a:solidFill>
-          </a:ln>
-        </p:spPr>
-      </p:sp>
-      <p:sp>
-        <p:nvSpPr>
-          <p:cNvPr id="3" name="Notes Placeholder 2">
-            <a:extLst>
-              <a:ext uri="{FF2B5EF4-FFF2-40B4-BE49-F238E27FC236}">
-                <a16:creationId xmlns:a16="http://schemas.microsoft.com/office/drawing/2014/main" id="{1F09DA29-9705-9F6B-3D49-BD41018A3204}"/>
-              </a:ext>
-            </a:extLst>
-          </p:cNvPr>
-          <p:cNvSpPr>
-            <a:spLocks noGrp="1"/>
-          </p:cNvSpPr>
-          <p:nvPr>
-            <p:ph type="body" idx="1"/>
-          </p:nvPr>
-        </p:nvSpPr>
-        <p:spPr>
-          <a:xfrm>
-            <a:off x="685800" y="5867400"/>
-            <a:ext cx="5486400" cy="4800600"/>
-          </a:xfrm>
-          <a:prstGeom prst="rect">
-            <a:avLst/>
-          </a:prstGeom>
-        </p:spPr>
-        <p:txBody>
-          <a:bodyPr/>
-          <a:lstStyle/>
-          <a:p>
-            <a:endParaRPr lang="en-US"/>
-          </a:p>
-        </p:txBody>
-      </p:sp>
-    </p:spTree>
-    <p:extLst>
-      <p:ext uri="{BB962C8B-B14F-4D97-AF65-F5344CB8AC3E}">
-        <p14:creationId xmlns:p14="http://schemas.microsoft.com/office/powerpoint/2010/main" val="2398303278"/>
       </p:ext>
     </p:extLst>
   </p:cSld>
@@ -3358,7 +3253,7 @@
                 <a:ea typeface="Bookman Old Style" pitchFamily="34" charset="-122"/>
                 <a:cs typeface="Bookman Old Style" pitchFamily="34" charset="-120"/>
               </a:rPr>
-              <a:t>Day 3</a:t>
+              <a:t>Session 3</a:t>
             </a:r>
             <a:endParaRPr lang="en-US" sz="5600" dirty="0"/>
           </a:p>
@@ -11342,700 +11237,6 @@
         </p:txBody>
       </p:sp>
     </p:spTree>
-  </p:cSld>
-  <p:clrMapOvr>
-    <a:masterClrMapping/>
-  </p:clrMapOvr>
-</p:sld>
-</file>
-
-<file path=ppt/slides/slide24.xml><?xml version="1.0" encoding="utf-8"?>
-<p:sld xmlns:a="http://schemas.openxmlformats.org/drawingml/2006/main" xmlns:r="http://schemas.openxmlformats.org/officeDocument/2006/relationships" xmlns:p="http://schemas.openxmlformats.org/presentationml/2006/main">
-  <p:cSld>
-    <p:spTree>
-      <p:nvGrpSpPr>
-        <p:cNvPr id="1" name="">
-          <a:extLst>
-            <a:ext uri="{FF2B5EF4-FFF2-40B4-BE49-F238E27FC236}">
-              <a16:creationId xmlns:a16="http://schemas.microsoft.com/office/drawing/2014/main" id="{13752069-C849-3E8A-174B-6C0615D40784}"/>
-            </a:ext>
-          </a:extLst>
-        </p:cNvPr>
-        <p:cNvGrpSpPr/>
-        <p:nvPr/>
-      </p:nvGrpSpPr>
-      <p:grpSpPr>
-        <a:xfrm>
-          <a:off x="0" y="0"/>
-          <a:ext cx="0" cy="0"/>
-          <a:chOff x="0" y="0"/>
-          <a:chExt cx="0" cy="0"/>
-        </a:xfrm>
-      </p:grpSpPr>
-      <p:sp>
-        <p:nvSpPr>
-          <p:cNvPr id="3" name="DividerNum">
-            <a:extLst>
-              <a:ext uri="{FF2B5EF4-FFF2-40B4-BE49-F238E27FC236}">
-                <a16:creationId xmlns:a16="http://schemas.microsoft.com/office/drawing/2014/main" id="{AC0E9DE4-118D-6E98-2451-537E31AB4607}"/>
-              </a:ext>
-            </a:extLst>
-          </p:cNvPr>
-          <p:cNvSpPr txBox="1"/>
-          <p:nvPr/>
-        </p:nvSpPr>
-        <p:spPr>
-          <a:xfrm>
-            <a:off x="1041400" y="2840335"/>
-            <a:ext cx="9652000" cy="923330"/>
-          </a:xfrm>
-          <a:prstGeom prst="rect">
-            <a:avLst/>
-          </a:prstGeom>
-          <a:noFill/>
-        </p:spPr>
-        <p:txBody>
-          <a:bodyPr vertOverflow="overflow" vert="horz" wrap="square" rtlCol="0" anchor="ctr" anchorCtr="0">
-            <a:spAutoFit/>
-          </a:bodyPr>
-          <a:lstStyle/>
-          <a:p>
-            <a:pPr algn="l"/>
-            <a:r>
-              <a:rPr lang="en-US" sz="5400" b="1" dirty="0">
-                <a:solidFill>
-                  <a:srgbClr val="15686B"/>
-                </a:solidFill>
-              </a:rPr>
-              <a:t>Backup Slides</a:t>
-            </a:r>
-          </a:p>
-        </p:txBody>
-      </p:sp>
-    </p:spTree>
-    <p:extLst>
-      <p:ext uri="{BB962C8B-B14F-4D97-AF65-F5344CB8AC3E}">
-        <p14:creationId xmlns:p14="http://schemas.microsoft.com/office/powerpoint/2010/main" val="3564758909"/>
-      </p:ext>
-    </p:extLst>
-  </p:cSld>
-  <p:clrMapOvr>
-    <a:masterClrMapping/>
-  </p:clrMapOvr>
-</p:sld>
-</file>
-
-<file path=ppt/slides/slide25.xml><?xml version="1.0" encoding="utf-8"?>
-<p:sld xmlns:a="http://schemas.openxmlformats.org/drawingml/2006/main" xmlns:r="http://schemas.openxmlformats.org/officeDocument/2006/relationships" xmlns:p="http://schemas.openxmlformats.org/presentationml/2006/main">
-  <p:cSld>
-    <p:spTree>
-      <p:nvGrpSpPr>
-        <p:cNvPr id="1" name="">
-          <a:extLst>
-            <a:ext uri="{FF2B5EF4-FFF2-40B4-BE49-F238E27FC236}">
-              <a16:creationId xmlns:a16="http://schemas.microsoft.com/office/drawing/2014/main" id="{9874C017-64D0-82A9-F277-1B15C1376FC3}"/>
-            </a:ext>
-          </a:extLst>
-        </p:cNvPr>
-        <p:cNvGrpSpPr/>
-        <p:nvPr/>
-      </p:nvGrpSpPr>
-      <p:grpSpPr>
-        <a:xfrm>
-          <a:off x="0" y="0"/>
-          <a:ext cx="0" cy="0"/>
-          <a:chOff x="0" y="0"/>
-          <a:chExt cx="0" cy="0"/>
-        </a:xfrm>
-      </p:grpSpPr>
-      <p:sp>
-        <p:nvSpPr>
-          <p:cNvPr id="2" name="Text 1">
-            <a:extLst>
-              <a:ext uri="{FF2B5EF4-FFF2-40B4-BE49-F238E27FC236}">
-                <a16:creationId xmlns:a16="http://schemas.microsoft.com/office/drawing/2014/main" id="{27F81AE2-39D1-F6E2-E01E-274585F610B5}"/>
-              </a:ext>
-            </a:extLst>
-          </p:cNvPr>
-          <p:cNvSpPr>
-            <a:spLocks noGrp="1"/>
-          </p:cNvSpPr>
-          <p:nvPr>
-            <p:ph type="title" idx="102" hasCustomPrompt="1"/>
-          </p:nvPr>
-        </p:nvSpPr>
-        <p:spPr>
-          <a:xfrm>
-            <a:off x="685800" y="868680"/>
-            <a:ext cx="8046720" cy="868680"/>
-          </a:xfrm>
-          <a:prstGeom prst="rect">
-            <a:avLst/>
-          </a:prstGeom>
-          <a:noFill/>
-          <a:ln/>
-        </p:spPr>
-        <p:txBody>
-          <a:bodyPr wrap="square" lIns="0" tIns="0" rIns="0" bIns="0" rtlCol="0" anchor="ctr"/>
-          <a:lstStyle/>
-          <a:p>
-            <a:pPr marL="0" indent="0" algn="l">
-              <a:buNone/>
-            </a:pPr>
-            <a:r>
-              <a:rPr lang="en-US" sz="3800" dirty="0"/>
-              <a:t>A Line You Have Already Met</a:t>
-            </a:r>
-          </a:p>
-        </p:txBody>
-      </p:sp>
-      <p:sp>
-        <p:nvSpPr>
-          <p:cNvPr id="3" name="Text 1">
-            <a:extLst>
-              <a:ext uri="{FF2B5EF4-FFF2-40B4-BE49-F238E27FC236}">
-                <a16:creationId xmlns:a16="http://schemas.microsoft.com/office/drawing/2014/main" id="{76C866DE-8D41-4444-718A-B004165057F2}"/>
-              </a:ext>
-            </a:extLst>
-          </p:cNvPr>
-          <p:cNvSpPr/>
-          <p:nvPr/>
-        </p:nvSpPr>
-        <p:spPr>
-          <a:xfrm>
-            <a:off x="685800" y="2011680"/>
-            <a:ext cx="10058400" cy="3291840"/>
-          </a:xfrm>
-          <a:prstGeom prst="rect">
-            <a:avLst/>
-          </a:prstGeom>
-          <a:noFill/>
-          <a:ln/>
-        </p:spPr>
-        <p:txBody>
-          <a:bodyPr wrap="square" lIns="0" tIns="0" rIns="0" bIns="0" rtlCol="0" anchor="t"/>
-          <a:lstStyle/>
-          <a:p>
-            <a:pPr marL="800100" lvl="1" indent="-342900">
-              <a:spcAft>
-                <a:spcPts val="1600"/>
-              </a:spcAft>
-              <a:buSzPct val="100000"/>
-              <a:buChar char="•"/>
-            </a:pPr>
-            <a:r>
-              <a:rPr lang="en-US" sz="2400" dirty="0">
-                <a:solidFill>
-                  <a:srgbClr val="262320"/>
-                </a:solidFill>
-                <a:latin typeface="Calibri" pitchFamily="34" charset="0"/>
-                <a:cs typeface="Calibri" pitchFamily="34" charset="-120"/>
-              </a:rPr>
-              <a:t>Arbitrary categories came from clinical medicine: BMI 25, systolic 130.</a:t>
-            </a:r>
-          </a:p>
-          <a:p>
-            <a:pPr marL="800100" lvl="1" indent="-342900">
-              <a:spcAft>
-                <a:spcPts val="1600"/>
-              </a:spcAft>
-              <a:buSzPct val="100000"/>
-              <a:buChar char="•"/>
-            </a:pPr>
-            <a:r>
-              <a:rPr lang="en-US" sz="2400" dirty="0">
-                <a:solidFill>
-                  <a:srgbClr val="262320"/>
-                </a:solidFill>
-                <a:latin typeface="Calibri" pitchFamily="34" charset="0"/>
-                <a:cs typeface="Calibri" pitchFamily="34" charset="-120"/>
-              </a:rPr>
-              <a:t>Statistics draws the same kind of line on itself. A study is "significant" if p falls below 0.05, and not otherwise.</a:t>
-            </a:r>
-          </a:p>
-          <a:p>
-            <a:pPr marL="800100" lvl="1" indent="-342900">
-              <a:spcAft>
-                <a:spcPts val="1600"/>
-              </a:spcAft>
-              <a:buSzPct val="100000"/>
-              <a:buChar char="•"/>
-            </a:pPr>
-            <a:r>
-              <a:rPr lang="en-US" sz="2400" dirty="0">
-                <a:solidFill>
-                  <a:srgbClr val="262320"/>
-                </a:solidFill>
-                <a:latin typeface="Calibri" pitchFamily="34" charset="0"/>
-                <a:cs typeface="Calibri" pitchFamily="34" charset="-120"/>
-              </a:rPr>
-              <a:t>p is a continuous quantity. 0.05 is a convention, not a discovery. R. A. Fisher drew it in 1925 because it was convenient.</a:t>
-            </a:r>
-          </a:p>
-          <a:p>
-            <a:pPr marL="800100" lvl="1" indent="-342900">
-              <a:spcAft>
-                <a:spcPts val="1600"/>
-              </a:spcAft>
-              <a:buSzPct val="100000"/>
-              <a:buChar char="•"/>
-            </a:pPr>
-            <a:r>
-              <a:rPr lang="en-US" sz="2400" dirty="0">
-                <a:solidFill>
-                  <a:srgbClr val="262320"/>
-                </a:solidFill>
-                <a:latin typeface="Calibri" pitchFamily="34" charset="0"/>
-                <a:cs typeface="Calibri" pitchFamily="34" charset="-120"/>
-              </a:rPr>
-              <a:t>Everything Fault 3 taught about cutoffs applies to the line the research itself is graded on.</a:t>
-            </a:r>
-          </a:p>
-        </p:txBody>
-      </p:sp>
-      <p:sp>
-        <p:nvSpPr>
-          <p:cNvPr id="90" name="Source"/>
-          <p:cNvSpPr/>
-          <p:nvPr/>
-        </p:nvSpPr>
-        <p:spPr>
-          <a:xfrm>
-            <a:off x="685800" y="6461760"/>
-            <a:ext cx="10972800" cy="292608"/>
-          </a:xfrm>
-          <a:prstGeom prst="rect">
-            <a:avLst/>
-          </a:prstGeom>
-          <a:noFill/>
-          <a:ln/>
-        </p:spPr>
-        <p:txBody>
-          <a:bodyPr wrap="square" lIns="0" tIns="0" rIns="0" bIns="0" rtlCol="0" anchor="ctr"/>
-          <a:lstStyle/>
-          <a:p>
-            <a:pPr marL="0" indent="0" algn="l">
-              <a:buNone/>
-            </a:pPr>
-            <a:r>
-              <a:rPr lang="en-US" sz="1200" i="1" dirty="0">
-                <a:solidFill>
-                  <a:srgbClr val="6B7280"/>
-                </a:solidFill>
-                <a:latin typeface="Calibri" pitchFamily="34" charset="0"/>
-                <a:cs typeface="Calibri" pitchFamily="34" charset="-120"/>
-              </a:rPr>
-              <a:t>Fisher RA. Statistical Methods for Research Workers. Oliver &amp; Boyd, 1925. His word for the 0.05 level was "convenient".</a:t>
-            </a:r>
-          </a:p>
-        </p:txBody>
-      </p:sp>
-    </p:spTree>
-    <p:extLst>
-      <p:ext uri="{BB962C8B-B14F-4D97-AF65-F5344CB8AC3E}">
-        <p14:creationId xmlns:p14="http://schemas.microsoft.com/office/powerpoint/2010/main" val="3665872735"/>
-      </p:ext>
-    </p:extLst>
-  </p:cSld>
-  <p:clrMapOvr>
-    <a:masterClrMapping/>
-  </p:clrMapOvr>
-</p:sld>
-</file>
-
-<file path=ppt/slides/slide26.xml><?xml version="1.0" encoding="utf-8"?>
-<p:sld xmlns:a="http://schemas.openxmlformats.org/drawingml/2006/main" xmlns:r="http://schemas.openxmlformats.org/officeDocument/2006/relationships" xmlns:p="http://schemas.openxmlformats.org/presentationml/2006/main">
-  <p:cSld>
-    <p:spTree>
-      <p:nvGrpSpPr>
-        <p:cNvPr id="1" name="">
-          <a:extLst>
-            <a:ext uri="{FF2B5EF4-FFF2-40B4-BE49-F238E27FC236}">
-              <a16:creationId xmlns:a16="http://schemas.microsoft.com/office/drawing/2014/main" id="{9874C017-64D0-82A9-F277-1B15C1376FC3}"/>
-            </a:ext>
-          </a:extLst>
-        </p:cNvPr>
-        <p:cNvGrpSpPr/>
-        <p:nvPr/>
-      </p:nvGrpSpPr>
-      <p:grpSpPr>
-        <a:xfrm>
-          <a:off x="0" y="0"/>
-          <a:ext cx="0" cy="0"/>
-          <a:chOff x="0" y="0"/>
-          <a:chExt cx="0" cy="0"/>
-        </a:xfrm>
-      </p:grpSpPr>
-      <p:sp>
-        <p:nvSpPr>
-          <p:cNvPr id="2" name="Text 1">
-            <a:extLst>
-              <a:ext uri="{FF2B5EF4-FFF2-40B4-BE49-F238E27FC236}">
-                <a16:creationId xmlns:a16="http://schemas.microsoft.com/office/drawing/2014/main" id="{27F81AE2-39D1-F6E2-E01E-274585F610B5}"/>
-              </a:ext>
-            </a:extLst>
-          </p:cNvPr>
-          <p:cNvSpPr>
-            <a:spLocks noGrp="1"/>
-          </p:cNvSpPr>
-          <p:nvPr>
-            <p:ph type="title" idx="102" hasCustomPrompt="1"/>
-          </p:nvPr>
-        </p:nvSpPr>
-        <p:spPr>
-          <a:xfrm>
-            <a:off x="685800" y="868680"/>
-            <a:ext cx="8046720" cy="868680"/>
-          </a:xfrm>
-          <a:prstGeom prst="rect">
-            <a:avLst/>
-          </a:prstGeom>
-          <a:noFill/>
-          <a:ln/>
-        </p:spPr>
-        <p:txBody>
-          <a:bodyPr wrap="square" lIns="0" tIns="0" rIns="0" bIns="0" rtlCol="0" anchor="ctr"/>
-          <a:lstStyle/>
-          <a:p>
-            <a:pPr marL="0" indent="0" algn="l">
-              <a:buNone/>
-            </a:pPr>
-            <a:r>
-              <a:rPr lang="en-US" sz="3800" dirty="0"/>
-              <a:t>Too Few Cases, Read as No Effect</a:t>
-            </a:r>
-          </a:p>
-        </p:txBody>
-      </p:sp>
-      <p:sp>
-        <p:nvSpPr>
-          <p:cNvPr id="3" name="Text 1">
-            <a:extLst>
-              <a:ext uri="{FF2B5EF4-FFF2-40B4-BE49-F238E27FC236}">
-                <a16:creationId xmlns:a16="http://schemas.microsoft.com/office/drawing/2014/main" id="{76C866DE-8D41-4444-718A-B004165057F2}"/>
-              </a:ext>
-            </a:extLst>
-          </p:cNvPr>
-          <p:cNvSpPr/>
-          <p:nvPr/>
-        </p:nvSpPr>
-        <p:spPr>
-          <a:xfrm>
-            <a:off x="685800" y="2011680"/>
-            <a:ext cx="10058400" cy="3291840"/>
-          </a:xfrm>
-          <a:prstGeom prst="rect">
-            <a:avLst/>
-          </a:prstGeom>
-          <a:noFill/>
-          <a:ln/>
-        </p:spPr>
-        <p:txBody>
-          <a:bodyPr wrap="square" lIns="0" tIns="0" rIns="0" bIns="0" rtlCol="0" anchor="t"/>
-          <a:lstStyle/>
-          <a:p>
-            <a:pPr marL="800100" lvl="1" indent="-342900">
-              <a:spcAft>
-                <a:spcPts val="1600"/>
-              </a:spcAft>
-              <a:buSzPct val="100000"/>
-              <a:buChar char="•"/>
-            </a:pPr>
-            <a:r>
-              <a:rPr lang="en-US" sz="2400" dirty="0">
-                <a:solidFill>
-                  <a:srgbClr val="262320"/>
-                </a:solidFill>
-                <a:latin typeface="Calibri" pitchFamily="34" charset="0"/>
-                <a:cs typeface="Calibri" pitchFamily="34" charset="-120"/>
-              </a:rPr>
-              <a:t>[Placeholder: ASCOT-LLA’s women.]</a:t>
-            </a:r>
-          </a:p>
-          <a:p>
-            <a:pPr marL="800100" lvl="1" indent="-342900">
-              <a:spcAft>
-                <a:spcPts val="1600"/>
-              </a:spcAft>
-              <a:buSzPct val="100000"/>
-              <a:buChar char="•"/>
-            </a:pPr>
-            <a:r>
-              <a:rPr lang="en-US" sz="2400" dirty="0">
-                <a:solidFill>
-                  <a:srgbClr val="262320"/>
-                </a:solidFill>
-                <a:latin typeface="Calibri" pitchFamily="34" charset="0"/>
-                <a:cs typeface="Calibri" pitchFamily="34" charset="-120"/>
-              </a:rPr>
-              <a:t>Only 36 heart events among women in the whole trial. The label calls the result inconclusive.</a:t>
-            </a:r>
-          </a:p>
-          <a:p>
-            <a:pPr marL="800100" lvl="1" indent="-342900">
-              <a:spcAft>
-                <a:spcPts val="1600"/>
-              </a:spcAft>
-              <a:buSzPct val="100000"/>
-              <a:buChar char="•"/>
-            </a:pPr>
-            <a:r>
-              <a:rPr lang="en-US" sz="2400" dirty="0">
-                <a:solidFill>
-                  <a:srgbClr val="262320"/>
-                </a:solidFill>
-                <a:latin typeface="Calibri" pitchFamily="34" charset="0"/>
-                <a:cs typeface="Calibri" pitchFamily="34" charset="-120"/>
-              </a:rPr>
-              <a:t>Correspondents read that as evidence the drug does not help women.</a:t>
-            </a:r>
-          </a:p>
-          <a:p>
-            <a:pPr marL="800100" lvl="1" indent="-342900">
-              <a:spcAft>
-                <a:spcPts val="1600"/>
-              </a:spcAft>
-              <a:buSzPct val="100000"/>
-              <a:buChar char="•"/>
-            </a:pPr>
-            <a:r>
-              <a:rPr lang="en-US" sz="2400" dirty="0">
-                <a:solidFill>
-                  <a:srgbClr val="262320"/>
-                </a:solidFill>
-                <a:latin typeface="Calibri" pitchFamily="34" charset="0"/>
-                <a:cs typeface="Calibri" pitchFamily="34" charset="-120"/>
-              </a:rPr>
-              <a:t>The investigators replied that 36 events cannot show much, and that absent evidence of a different effect, the whole-trial result is the best estimate for women too.</a:t>
-            </a:r>
-          </a:p>
-          <a:p>
-            <a:pPr marL="800100" lvl="1" indent="-342900">
-              <a:spcAft>
-                <a:spcPts val="1600"/>
-              </a:spcAft>
-              <a:buSzPct val="100000"/>
-              <a:buChar char="•"/>
-            </a:pPr>
-            <a:r>
-              <a:rPr lang="en-US" sz="2400" dirty="0">
-                <a:solidFill>
-                  <a:srgbClr val="262320"/>
-                </a:solidFill>
-                <a:latin typeface="Calibri" pitchFamily="34" charset="0"/>
-                <a:cs typeface="Calibri" pitchFamily="34" charset="-120"/>
-              </a:rPr>
-              <a:t>Source: Sever PS, et al. Lancet 2003;361:1986.</a:t>
-            </a:r>
-          </a:p>
-        </p:txBody>
-      </p:sp>
-    </p:spTree>
-    <p:extLst>
-      <p:ext uri="{BB962C8B-B14F-4D97-AF65-F5344CB8AC3E}">
-        <p14:creationId xmlns:p14="http://schemas.microsoft.com/office/powerpoint/2010/main" val="2390172238"/>
-      </p:ext>
-    </p:extLst>
-  </p:cSld>
-  <p:clrMapOvr>
-    <a:masterClrMapping/>
-  </p:clrMapOvr>
-</p:sld>
-</file>
-
-<file path=ppt/slides/slide27.xml><?xml version="1.0" encoding="utf-8"?>
-<p:sld xmlns:a="http://schemas.openxmlformats.org/drawingml/2006/main" xmlns:r="http://schemas.openxmlformats.org/officeDocument/2006/relationships" xmlns:p="http://schemas.openxmlformats.org/presentationml/2006/main">
-  <p:cSld>
-    <p:spTree>
-      <p:nvGrpSpPr>
-        <p:cNvPr id="1" name="">
-          <a:extLst>
-            <a:ext uri="{FF2B5EF4-FFF2-40B4-BE49-F238E27FC236}">
-              <a16:creationId xmlns:a16="http://schemas.microsoft.com/office/drawing/2014/main" id="{9874C017-64D0-82A9-F277-1B15C1376FC3}"/>
-            </a:ext>
-          </a:extLst>
-        </p:cNvPr>
-        <p:cNvGrpSpPr/>
-        <p:nvPr/>
-      </p:nvGrpSpPr>
-      <p:grpSpPr>
-        <a:xfrm>
-          <a:off x="0" y="0"/>
-          <a:ext cx="0" cy="0"/>
-          <a:chOff x="0" y="0"/>
-          <a:chExt cx="0" cy="0"/>
-        </a:xfrm>
-      </p:grpSpPr>
-      <p:sp>
-        <p:nvSpPr>
-          <p:cNvPr id="2" name="Text 1">
-            <a:extLst>
-              <a:ext uri="{FF2B5EF4-FFF2-40B4-BE49-F238E27FC236}">
-                <a16:creationId xmlns:a16="http://schemas.microsoft.com/office/drawing/2014/main" id="{27F81AE2-39D1-F6E2-E01E-274585F610B5}"/>
-              </a:ext>
-            </a:extLst>
-          </p:cNvPr>
-          <p:cNvSpPr>
-            <a:spLocks noGrp="1"/>
-          </p:cNvSpPr>
-          <p:nvPr>
-            <p:ph type="title" idx="102" hasCustomPrompt="1"/>
-          </p:nvPr>
-        </p:nvSpPr>
-        <p:spPr>
-          <a:xfrm>
-            <a:off x="685800" y="868680"/>
-            <a:ext cx="8046720" cy="868680"/>
-          </a:xfrm>
-          <a:prstGeom prst="rect">
-            <a:avLst/>
-          </a:prstGeom>
-          <a:noFill/>
-          <a:ln/>
-        </p:spPr>
-        <p:txBody>
-          <a:bodyPr wrap="square" lIns="0" tIns="0" rIns="0" bIns="0" rtlCol="0" anchor="ctr"/>
-          <a:lstStyle/>
-          <a:p>
-            <a:pPr marL="0" indent="0" algn="l">
-              <a:buNone/>
-            </a:pPr>
-            <a:r>
-              <a:rPr lang="en-US" sz="3800" dirty="0"/>
-              <a:t>Sixty Side Effects at Once</a:t>
-            </a:r>
-          </a:p>
-        </p:txBody>
-      </p:sp>
-      <p:sp>
-        <p:nvSpPr>
-          <p:cNvPr id="3" name="Text 1">
-            <a:extLst>
-              <a:ext uri="{FF2B5EF4-FFF2-40B4-BE49-F238E27FC236}">
-                <a16:creationId xmlns:a16="http://schemas.microsoft.com/office/drawing/2014/main" id="{76C866DE-8D41-4444-718A-B004165057F2}"/>
-              </a:ext>
-            </a:extLst>
-          </p:cNvPr>
-          <p:cNvSpPr/>
-          <p:nvPr/>
-        </p:nvSpPr>
-        <p:spPr>
-          <a:xfrm>
-            <a:off x="685800" y="2011680"/>
-            <a:ext cx="10058400" cy="3291840"/>
-          </a:xfrm>
-          <a:prstGeom prst="rect">
-            <a:avLst/>
-          </a:prstGeom>
-          <a:noFill/>
-          <a:ln/>
-        </p:spPr>
-        <p:txBody>
-          <a:bodyPr wrap="square" lIns="0" tIns="0" rIns="0" bIns="0" rtlCol="0" anchor="t"/>
-          <a:lstStyle/>
-          <a:p>
-            <a:pPr marL="800100" lvl="1" indent="-342900">
-              <a:spcAft>
-                <a:spcPts val="1600"/>
-              </a:spcAft>
-              <a:buSzPct val="100000"/>
-              <a:buChar char="•"/>
-            </a:pPr>
-            <a:r>
-              <a:rPr lang="en-US" sz="2400" dirty="0">
-                <a:solidFill>
-                  <a:srgbClr val="262320"/>
-                </a:solidFill>
-                <a:latin typeface="Calibri" pitchFamily="34" charset="0"/>
-                <a:cs typeface="Calibri" pitchFamily="34" charset="-120"/>
-              </a:rPr>
-              <a:t>[Placeholder: the 2026 statin label meta-analysis.]</a:t>
-            </a:r>
-          </a:p>
-          <a:p>
-            <a:pPr marL="800100" lvl="1" indent="-342900">
-              <a:spcAft>
-                <a:spcPts val="1600"/>
-              </a:spcAft>
-              <a:buSzPct val="100000"/>
-              <a:buChar char="•"/>
-            </a:pPr>
-            <a:r>
-              <a:rPr lang="en-US" sz="2400" dirty="0">
-                <a:solidFill>
-                  <a:srgbClr val="262320"/>
-                </a:solidFill>
-                <a:latin typeface="Calibri" pitchFamily="34" charset="0"/>
-                <a:cs typeface="Calibri" pitchFamily="34" charset="-120"/>
-              </a:rPr>
-              <a:t>More than sixty labelled side effects tested, with a strict bar to avoid finding things by luck.</a:t>
-            </a:r>
-          </a:p>
-          <a:p>
-            <a:pPr marL="800100" lvl="1" indent="-342900">
-              <a:spcAft>
-                <a:spcPts val="1600"/>
-              </a:spcAft>
-              <a:buSzPct val="100000"/>
-              <a:buChar char="•"/>
-            </a:pPr>
-            <a:r>
-              <a:rPr lang="en-US" sz="2400" dirty="0">
-                <a:solidFill>
-                  <a:srgbClr val="262320"/>
-                </a:solidFill>
-                <a:latin typeface="Calibri" pitchFamily="34" charset="0"/>
-                <a:cs typeface="Calibri" pitchFamily="34" charset="-120"/>
-              </a:rPr>
-              <a:t>Six survived. The conclusion drawn was that the labels should be trimmed.</a:t>
-            </a:r>
-          </a:p>
-          <a:p>
-            <a:pPr marL="800100" lvl="1" indent="-342900">
-              <a:spcAft>
-                <a:spcPts val="1600"/>
-              </a:spcAft>
-              <a:buSzPct val="100000"/>
-              <a:buChar char="•"/>
-            </a:pPr>
-            <a:r>
-              <a:rPr lang="en-US" sz="2400" dirty="0">
-                <a:solidFill>
-                  <a:srgbClr val="262320"/>
-                </a:solidFill>
-                <a:latin typeface="Calibri" pitchFamily="34" charset="0"/>
-                <a:cs typeface="Calibri" pitchFamily="34" charset="-120"/>
-              </a:rPr>
-              <a:t>A strict bar also means real effects get missed, and that rate was never reported.</a:t>
-            </a:r>
-          </a:p>
-          <a:p>
-            <a:pPr marL="800100" lvl="1" indent="-342900">
-              <a:spcAft>
-                <a:spcPts val="1600"/>
-              </a:spcAft>
-              <a:buSzPct val="100000"/>
-              <a:buChar char="•"/>
-            </a:pPr>
-            <a:r>
-              <a:rPr lang="en-US" sz="2400" dirty="0">
-                <a:solidFill>
-                  <a:srgbClr val="262320"/>
-                </a:solidFill>
-                <a:latin typeface="Calibri" pitchFamily="34" charset="0"/>
-                <a:cs typeface="Calibri" pitchFamily="34" charset="-120"/>
-              </a:rPr>
-              <a:t>Source: Cholesterol Treatment Trialists’ Collaboration, Lancet 2026;407:689-703.</a:t>
-            </a:r>
-          </a:p>
-        </p:txBody>
-      </p:sp>
-    </p:spTree>
-    <p:extLst>
-      <p:ext uri="{BB962C8B-B14F-4D97-AF65-F5344CB8AC3E}">
-        <p14:creationId xmlns:p14="http://schemas.microsoft.com/office/powerpoint/2010/main" val="1983079406"/>
-      </p:ext>
-    </p:extLst>
   </p:cSld>
   <p:clrMapOvr>
     <a:masterClrMapping/>
